--- a/assets/pptx/catalog-513.pptx
+++ b/assets/pptx/catalog-513.pptx
@@ -3256,7 +3256,7 @@
                 <a:ea typeface="Ebrima"/>
                 <a:cs typeface="Ebrima"/>
               </a:rPr>
-              <a:t>አንድ ላይ ተስማሙ እውነትና ምህረት (2x)</a:t>
+              <a:t>አንድ ላይ ተስማሙ እውነትና ምህረት 2x</a:t>
             </a:r>
           </a:p>
           <a:p>
@@ -3274,7 +3274,7 @@
                 <a:ea typeface="Ebrima"/>
                 <a:cs typeface="Ebrima"/>
               </a:rPr>
-              <a:t>መግባትም ተቻለን እግዚአብሔር ካለበት (2x)</a:t>
+              <a:t>መግባትም ተቻለን እግዚአብሔር ካለበት 2x</a:t>
             </a:r>
           </a:p>
           <a:p>
@@ -3292,7 +3292,7 @@
                 <a:ea typeface="Ebrima"/>
                 <a:cs typeface="Ebrima"/>
               </a:rPr>
-              <a:t>ጻድቅ ፈራጅ ሲሆን እንከን የሌለበት (2x)</a:t>
+              <a:t>ጻድቅ ፈራጅ ሲሆን እንከን የሌለበት 2x</a:t>
             </a:r>
           </a:p>
           <a:p>
@@ -3310,7 +3310,7 @@
                 <a:ea typeface="Ebrima"/>
                 <a:cs typeface="Ebrima"/>
               </a:rPr>
-              <a:t>አልፈረደብኝም ምህረቱ አይሎበት (2x)</a:t>
+              <a:t>አልፈረደብኝም ምህረቱ አይሎበት 2x</a:t>
             </a:r>
           </a:p>
         </p:txBody>
@@ -3449,7 +3449,7 @@
                 <a:ea typeface="Ebrima"/>
                 <a:cs typeface="Ebrima"/>
               </a:rPr>
-              <a:t>የእኔ ጌታ ይድረሰው ምሥጋና (4x)</a:t>
+              <a:t>የእኔ ጌታ ይድረሰው ምሥጋና 4x</a:t>
             </a:r>
           </a:p>
         </p:txBody>
@@ -3516,7 +3516,7 @@
                 <a:ea typeface="Ebrima"/>
                 <a:cs typeface="Ebrima"/>
               </a:rPr>
-              <a:t>ጌታ እልሃለሁ አንተን አመልካለሁ (2x)</a:t>
+              <a:t>ጌታ እልሃለሁ አንተን አመልካለሁ 2x</a:t>
             </a:r>
           </a:p>
           <a:p>
@@ -3534,7 +3534,7 @@
                 <a:ea typeface="Ebrima"/>
                 <a:cs typeface="Ebrima"/>
               </a:rPr>
-              <a:t>አምላክ እልሃለሁኝ አንተን አመልካለሁ (2x)</a:t>
+              <a:t>አምላክ እልሃለሁኝ አንተን አመልካለሁ 2x</a:t>
             </a:r>
           </a:p>
           <a:p>
@@ -3552,7 +3552,7 @@
                 <a:ea typeface="Ebrima"/>
                 <a:cs typeface="Ebrima"/>
               </a:rPr>
-              <a:t>አንተን አመልካለሁ አንተን አመልካለሁ (2x)</a:t>
+              <a:t>አንተን አመልካለሁ አንተን አመልካለሁ 2x</a:t>
             </a:r>
           </a:p>
         </p:txBody>
@@ -3740,7 +3740,7 @@
                 <a:ea typeface="Ebrima"/>
                 <a:cs typeface="Ebrima"/>
               </a:rPr>
-              <a:t>እኔ አምላክ እልሃለሁኝ አንተን አመልካለሁ (5x)</a:t>
+              <a:t>እኔ አምላክ እልሃለሁኝ አንተን አመልካለሁ 5x</a:t>
             </a:r>
           </a:p>
           <a:p>
@@ -4139,7 +4139,7 @@
                 <a:ea typeface="Ebrima"/>
                 <a:cs typeface="Ebrima"/>
               </a:rPr>
-              <a:t>ሃሌሉያ ሃሌሉያ (4x)</a:t>
+              <a:t>ሃሌሉያ ሃሌሉያ 4x</a:t>
             </a:r>
           </a:p>
           <a:p>
@@ -4157,7 +4157,7 @@
                 <a:ea typeface="Ebrima"/>
                 <a:cs typeface="Ebrima"/>
               </a:rPr>
-              <a:t>ሃሌሉያ ሃሌሉያ (4x)</a:t>
+              <a:t>ሃሌሉያ ሃሌሉያ 4x</a:t>
             </a:r>
           </a:p>
           <a:p>
@@ -4175,7 +4175,7 @@
                 <a:ea typeface="Ebrima"/>
                 <a:cs typeface="Ebrima"/>
               </a:rPr>
-              <a:t>ሃሌሉያ ሃሌሉያ (4x)</a:t>
+              <a:t>ሃሌሉያ ሃሌሉያ 4x</a:t>
             </a:r>
           </a:p>
         </p:txBody>
@@ -4363,7 +4363,7 @@
                 <a:ea typeface="Ebrima"/>
                 <a:cs typeface="Ebrima"/>
               </a:rPr>
-              <a:t>ምላሴ ጽድቅህን ሁልጊዜ ምሥጋናህን ይናገራል (3x)</a:t>
+              <a:t>ምላሴ ጽድቅህን ሁልጊዜ ምሥጋናህን ይናገራል 3x</a:t>
             </a:r>
           </a:p>
           <a:p>
@@ -4381,7 +4381,7 @@
                 <a:ea typeface="Ebrima"/>
                 <a:cs typeface="Ebrima"/>
               </a:rPr>
-              <a:t>ምላሴ ጽድቅህን ሁልጊዜ ምሥጋናህን ይናገራል (3x)</a:t>
+              <a:t>ምላሴ ጽድቅህን ሁልጊዜ ምሥጋናህን ይናገራል 3x</a:t>
             </a:r>
           </a:p>
         </p:txBody>
@@ -4569,7 +4569,7 @@
                 <a:ea typeface="Ebrima"/>
                 <a:cs typeface="Ebrima"/>
               </a:rPr>
-              <a:t>ምላሴ ጽድቅህን ሁልጊዜ ምሥጋናህን ይናገራል (3x)</a:t>
+              <a:t>ምላሴ ጽድቅህን ሁልጊዜ ምሥጋናህን ይናገራል 3x</a:t>
             </a:r>
           </a:p>
           <a:p>
@@ -4587,7 +4587,7 @@
                 <a:ea typeface="Ebrima"/>
                 <a:cs typeface="Ebrima"/>
               </a:rPr>
-              <a:t>ምላሴ ጽድቅህን ሁልጊዜ ምሥጋናህን ይናገራል (3x)</a:t>
+              <a:t>ምላሴ ጽድቅህን ሁልጊዜ ምሥጋናህን ይናገራል 3x</a:t>
             </a:r>
           </a:p>
         </p:txBody>
@@ -4690,7 +4690,7 @@
                 <a:ea typeface="Ebrima"/>
                 <a:cs typeface="Ebrima"/>
               </a:rPr>
-              <a:t>ይድረሰው ምሥጋና የእኔ ጌታ ይድረሰው ምሥጋና (2x)</a:t>
+              <a:t>ይድረሰው ምሥጋና የእኔ ጌታ ይድረሰው ምሥጋና 2x</a:t>
             </a:r>
           </a:p>
         </p:txBody>
@@ -4757,7 +4757,7 @@
                 <a:ea typeface="Ebrima"/>
                 <a:cs typeface="Ebrima"/>
               </a:rPr>
-              <a:t>እንኳንስ ምረሄኝ ቀርቶልኝ አበሳ (2x)</a:t>
+              <a:t>እንኳንስ ምረሄኝ ቀርቶልኝ አበሳ 2x</a:t>
             </a:r>
           </a:p>
           <a:p>
@@ -4775,7 +4775,7 @@
                 <a:ea typeface="Ebrima"/>
                 <a:cs typeface="Ebrima"/>
               </a:rPr>
-              <a:t>እኔስ ምሥጋናዬን ሁልጊዜው አልረሳ (2x)</a:t>
+              <a:t>እኔስ ምሥጋናዬን ሁልጊዜው አልረሳ 2x</a:t>
             </a:r>
           </a:p>
           <a:p>
@@ -4793,7 +4793,7 @@
                 <a:ea typeface="Ebrima"/>
                 <a:cs typeface="Ebrima"/>
               </a:rPr>
-              <a:t>ምህረትህ በእኔ ላይ ጠንክራለችና (2x)</a:t>
+              <a:t>ምህረትህ በእኔ ላይ ጠንክራለችና 2x</a:t>
             </a:r>
           </a:p>
           <a:p>
@@ -4811,7 +4811,7 @@
                 <a:ea typeface="Ebrima"/>
                 <a:cs typeface="Ebrima"/>
               </a:rPr>
-              <a:t>ኃይሌ ታድሶልኝ ቆምኩኝ እንደገና (2x)</a:t>
+              <a:t>ኃይሌ ታድሶልኝ ቆምኩኝ እንደገና 2x</a:t>
             </a:r>
           </a:p>
         </p:txBody>
@@ -4950,7 +4950,7 @@
                 <a:ea typeface="Ebrima"/>
                 <a:cs typeface="Ebrima"/>
               </a:rPr>
-              <a:t>የእኔ ጌታ ይድረሰው ምሥጋና (4x)</a:t>
+              <a:t>የእኔ ጌታ ይድረሰው ምሥጋና 4x</a:t>
             </a:r>
           </a:p>
         </p:txBody>
@@ -5017,7 +5017,7 @@
                 <a:ea typeface="Ebrima"/>
                 <a:cs typeface="Ebrima"/>
               </a:rPr>
-              <a:t>ማዳኑን አስታውቆ ጽድቁንም ገለጠ (2x)</a:t>
+              <a:t>ማዳኑን አስታውቆ ጽድቁንም ገለጠ 2x</a:t>
             </a:r>
           </a:p>
           <a:p>
@@ -5035,7 +5035,7 @@
                 <a:ea typeface="Ebrima"/>
                 <a:cs typeface="Ebrima"/>
               </a:rPr>
-              <a:t>ከእኛ መተላለፍ ምህረቱ በለጠ (2x)</a:t>
+              <a:t>ከእኛ መተላለፍ ምህረቱ በለጠ 2x</a:t>
             </a:r>
           </a:p>
           <a:p>
@@ -5053,7 +5053,7 @@
                 <a:ea typeface="Ebrima"/>
                 <a:cs typeface="Ebrima"/>
               </a:rPr>
-              <a:t>በሞገሱ ጋሻ እየከለለን (2x)</a:t>
+              <a:t>በሞገሱ ጋሻ እየከለለን 2x</a:t>
             </a:r>
           </a:p>
           <a:p>
@@ -5071,7 +5071,7 @@
                 <a:ea typeface="Ebrima"/>
                 <a:cs typeface="Ebrima"/>
               </a:rPr>
-              <a:t>ከአዳነን በኋላ ምህረቱ ያዘን (2x)</a:t>
+              <a:t>ከአዳነን በኋላ ምህረቱ ያዘን 2x</a:t>
             </a:r>
           </a:p>
         </p:txBody>
